--- a/docs/6k/diploma/prez/prez2.pptx
+++ b/docs/6k/diploma/prez/prez2.pptx
@@ -156,6 +156,9 @@
           </p14:sldIdLst>
         </p14:section>
       </p14:sectionLst>
+    </p:ext>
+    <p:ext uri="{EFAFB233-063F-42B5-8137-9DF3F51BA10A}">
+      <p15:sldGuideLst xmlns:p15="http://schemas.microsoft.com/office/powerpoint/2012/main"/>
     </p:ext>
   </p:extLst>
 </p:presentation>
@@ -9166,7 +9169,7 @@
         <p:spPr bwMode="auto">
           <a:xfrm>
             <a:off x="2467927" y="3002600"/>
-            <a:ext cx="7544898" cy="2246769"/>
+            <a:ext cx="7544898" cy="1938992"/>
           </a:xfrm>
           <a:prstGeom prst="rect">
             <a:avLst/>
@@ -9181,43 +9184,43 @@
           <a:p>
             <a:pPr algn="ctr"/>
             <a:r>
-              <a:rPr lang="ru-RU" sz="2800" cap="all" dirty="0">
-                <a:latin typeface="Arial" panose="020B0604020202020204" pitchFamily="34" charset="0"/>
-                <a:cs typeface="Arial" panose="020B0604020202020204" pitchFamily="34" charset="0"/>
+              <a:rPr lang="ru-RU" sz="2400" cap="all" dirty="0">
+                <a:latin typeface="Times New Roman" panose="02020603050405020304" pitchFamily="18" charset="0"/>
+                <a:cs typeface="Times New Roman" panose="02020603050405020304" pitchFamily="18" charset="0"/>
               </a:rPr>
               <a:t>Проектирование и разработка интерактивной информационной системы обучения и проверки навыков программирования</a:t>
             </a:r>
-            <a:endParaRPr lang="ru-KZ" sz="2800" cap="all" dirty="0">
-              <a:latin typeface="Arial" panose="020B0604020202020204" pitchFamily="34" charset="0"/>
-              <a:cs typeface="Arial" panose="020B0604020202020204" pitchFamily="34" charset="0"/>
+            <a:endParaRPr lang="ru-KZ" sz="2400" cap="all" dirty="0">
+              <a:latin typeface="Times New Roman" panose="02020603050405020304" pitchFamily="18" charset="0"/>
+              <a:cs typeface="Times New Roman" panose="02020603050405020304" pitchFamily="18" charset="0"/>
             </a:endParaRPr>
           </a:p>
           <a:p>
             <a:pPr algn="ctr"/>
             <a:r>
-              <a:rPr lang="ru-KZ" sz="2800" dirty="0">
-                <a:latin typeface="Arial" panose="020B0604020202020204" pitchFamily="34" charset="0"/>
-                <a:cs typeface="Arial" panose="020B0604020202020204" pitchFamily="34" charset="0"/>
+              <a:rPr lang="ru-KZ" sz="2400" dirty="0">
+                <a:latin typeface="Times New Roman" panose="02020603050405020304" pitchFamily="18" charset="0"/>
+                <a:cs typeface="Times New Roman" panose="02020603050405020304" pitchFamily="18" charset="0"/>
               </a:rPr>
               <a:t>«</a:t>
             </a:r>
             <a:r>
-              <a:rPr lang="en-US" sz="2800" dirty="0" err="1">
-                <a:latin typeface="Arial" panose="020B0604020202020204" pitchFamily="34" charset="0"/>
-                <a:cs typeface="Arial" panose="020B0604020202020204" pitchFamily="34" charset="0"/>
+              <a:rPr lang="en-US" sz="2400" dirty="0" err="1">
+                <a:latin typeface="Times New Roman" panose="02020603050405020304" pitchFamily="18" charset="0"/>
+                <a:cs typeface="Times New Roman" panose="02020603050405020304" pitchFamily="18" charset="0"/>
               </a:rPr>
               <a:t>SupremeCode</a:t>
             </a:r>
             <a:r>
-              <a:rPr lang="ru-KZ" sz="2800" dirty="0">
-                <a:latin typeface="Arial" panose="020B0604020202020204" pitchFamily="34" charset="0"/>
-                <a:cs typeface="Arial" panose="020B0604020202020204" pitchFamily="34" charset="0"/>
+              <a:rPr lang="ru-KZ" sz="2400" dirty="0">
+                <a:latin typeface="Times New Roman" panose="02020603050405020304" pitchFamily="18" charset="0"/>
+                <a:cs typeface="Times New Roman" panose="02020603050405020304" pitchFamily="18" charset="0"/>
               </a:rPr>
               <a:t>»</a:t>
             </a:r>
-            <a:endParaRPr lang="ru-KZ" sz="2400" dirty="0">
-              <a:latin typeface="Arial" panose="020B0604020202020204" pitchFamily="34" charset="0"/>
-              <a:cs typeface="Arial" panose="020B0604020202020204" pitchFamily="34" charset="0"/>
+            <a:endParaRPr lang="ru-KZ" sz="2000" dirty="0">
+              <a:latin typeface="Times New Roman" panose="02020603050405020304" pitchFamily="18" charset="0"/>
+              <a:cs typeface="Times New Roman" panose="02020603050405020304" pitchFamily="18" charset="0"/>
             </a:endParaRPr>
           </a:p>
         </p:txBody>
@@ -9237,7 +9240,7 @@
         <p:spPr bwMode="auto">
           <a:xfrm>
             <a:off x="292100" y="5249369"/>
-            <a:ext cx="4027256" cy="646331"/>
+            <a:ext cx="3778022" cy="646331"/>
           </a:xfrm>
           <a:prstGeom prst="rect">
             <a:avLst/>
@@ -9252,22 +9255,22 @@
           <a:p>
             <a:r>
               <a:rPr lang="en-US" dirty="0" err="1">
-                <a:latin typeface="Arial" panose="020B0604020202020204" pitchFamily="34" charset="0"/>
-                <a:cs typeface="Arial" panose="020B0604020202020204" pitchFamily="34" charset="0"/>
+                <a:latin typeface="Times New Roman" panose="02020603050405020304" pitchFamily="18" charset="0"/>
+                <a:cs typeface="Times New Roman" panose="02020603050405020304" pitchFamily="18" charset="0"/>
               </a:rPr>
               <a:t>П</a:t>
             </a:r>
             <a:r>
               <a:rPr lang="ru-RU" dirty="0" err="1">
-                <a:latin typeface="Arial" panose="020B0604020202020204" pitchFamily="34" charset="0"/>
-                <a:cs typeface="Arial" panose="020B0604020202020204" pitchFamily="34" charset="0"/>
+                <a:latin typeface="Times New Roman" panose="02020603050405020304" pitchFamily="18" charset="0"/>
+                <a:cs typeface="Times New Roman" panose="02020603050405020304" pitchFamily="18" charset="0"/>
               </a:rPr>
               <a:t>одготовил</a:t>
             </a:r>
             <a:r>
               <a:rPr lang="ru-RU" dirty="0">
-                <a:latin typeface="Arial" panose="020B0604020202020204" pitchFamily="34" charset="0"/>
-                <a:cs typeface="Arial" panose="020B0604020202020204" pitchFamily="34" charset="0"/>
+                <a:latin typeface="Times New Roman" panose="02020603050405020304" pitchFamily="18" charset="0"/>
+                <a:cs typeface="Times New Roman" panose="02020603050405020304" pitchFamily="18" charset="0"/>
               </a:rPr>
               <a:t>: студент группы МПР21</a:t>
             </a:r>
@@ -9275,21 +9278,21 @@
           <a:p>
             <a:r>
               <a:rPr lang="ru-RU" dirty="0" err="1">
-                <a:latin typeface="Arial" panose="020B0604020202020204" pitchFamily="34" charset="0"/>
-                <a:cs typeface="Arial" panose="020B0604020202020204" pitchFamily="34" charset="0"/>
+                <a:latin typeface="Times New Roman" panose="02020603050405020304" pitchFamily="18" charset="0"/>
+                <a:cs typeface="Times New Roman" panose="02020603050405020304" pitchFamily="18" charset="0"/>
               </a:rPr>
               <a:t>Голосуев</a:t>
             </a:r>
             <a:r>
               <a:rPr lang="ru-RU" dirty="0">
-                <a:latin typeface="Arial" panose="020B0604020202020204" pitchFamily="34" charset="0"/>
-                <a:cs typeface="Arial" panose="020B0604020202020204" pitchFamily="34" charset="0"/>
+                <a:latin typeface="Times New Roman" panose="02020603050405020304" pitchFamily="18" charset="0"/>
+                <a:cs typeface="Times New Roman" panose="02020603050405020304" pitchFamily="18" charset="0"/>
               </a:rPr>
               <a:t> Данил Витальевич</a:t>
             </a:r>
             <a:endParaRPr lang="ru-KZ" dirty="0">
-              <a:latin typeface="Arial" panose="020B0604020202020204" pitchFamily="34" charset="0"/>
-              <a:cs typeface="Arial" panose="020B0604020202020204" pitchFamily="34" charset="0"/>
+              <a:latin typeface="Times New Roman" panose="02020603050405020304" pitchFamily="18" charset="0"/>
+              <a:cs typeface="Times New Roman" panose="02020603050405020304" pitchFamily="18" charset="0"/>
             </a:endParaRPr>
           </a:p>
         </p:txBody>
@@ -9309,7 +9312,7 @@
         <p:spPr bwMode="auto">
           <a:xfrm>
             <a:off x="292100" y="5943734"/>
-            <a:ext cx="3272499" cy="646331"/>
+            <a:ext cx="2991203" cy="646331"/>
           </a:xfrm>
           <a:prstGeom prst="rect">
             <a:avLst/>
@@ -9324,15 +9327,15 @@
           <a:p>
             <a:r>
               <a:rPr lang="ru-KZ" dirty="0">
-                <a:latin typeface="Arial" panose="020B0604020202020204" pitchFamily="34" charset="0"/>
-                <a:cs typeface="Arial" panose="020B0604020202020204" pitchFamily="34" charset="0"/>
+                <a:latin typeface="Times New Roman" panose="02020603050405020304" pitchFamily="18" charset="0"/>
+                <a:cs typeface="Times New Roman" panose="02020603050405020304" pitchFamily="18" charset="0"/>
               </a:rPr>
               <a:t>Руководитель ВКР</a:t>
             </a:r>
             <a:r>
               <a:rPr lang="en-US" dirty="0">
-                <a:latin typeface="Arial" panose="020B0604020202020204" pitchFamily="34" charset="0"/>
-                <a:cs typeface="Arial" panose="020B0604020202020204" pitchFamily="34" charset="0"/>
+                <a:latin typeface="Times New Roman" panose="02020603050405020304" pitchFamily="18" charset="0"/>
+                <a:cs typeface="Times New Roman" panose="02020603050405020304" pitchFamily="18" charset="0"/>
               </a:rPr>
               <a:t>:</a:t>
             </a:r>
@@ -9340,63 +9343,18 @@
           <a:p>
             <a:r>
               <a:rPr lang="ru-RU" dirty="0">
-                <a:latin typeface="Arial" panose="020B0604020202020204" pitchFamily="34" charset="0"/>
-                <a:cs typeface="Arial" panose="020B0604020202020204" pitchFamily="34" charset="0"/>
+                <a:latin typeface="Times New Roman" panose="02020603050405020304" pitchFamily="18" charset="0"/>
+                <a:cs typeface="Times New Roman" panose="02020603050405020304" pitchFamily="18" charset="0"/>
               </a:rPr>
               <a:t>Долгов Василий Валерьевич</a:t>
             </a:r>
             <a:endParaRPr lang="ru-KZ" dirty="0">
-              <a:latin typeface="Arial" panose="020B0604020202020204" pitchFamily="34" charset="0"/>
-              <a:cs typeface="Arial" panose="020B0604020202020204" pitchFamily="34" charset="0"/>
+              <a:latin typeface="Times New Roman" panose="02020603050405020304" pitchFamily="18" charset="0"/>
+              <a:cs typeface="Times New Roman" panose="02020603050405020304" pitchFamily="18" charset="0"/>
             </a:endParaRPr>
           </a:p>
         </p:txBody>
       </p:sp>
-      <p:pic>
-        <p:nvPicPr>
-          <p:cNvPr id="15" name="Picture 10">
-            <a:extLst>
-              <a:ext uri="{FF2B5EF4-FFF2-40B4-BE49-F238E27FC236}">
-                <a16:creationId xmlns:a16="http://schemas.microsoft.com/office/drawing/2014/main" id="{FA1BF441-1C25-E6A1-F2B9-C0251AE466F3}"/>
-              </a:ext>
-            </a:extLst>
-          </p:cNvPr>
-          <p:cNvPicPr>
-            <a:picLocks noChangeAspect="1" noChangeArrowheads="1"/>
-          </p:cNvPicPr>
-          <p:nvPr/>
-        </p:nvPicPr>
-        <p:blipFill rotWithShape="1">
-          <a:blip r:embed="rId4">
-            <a:extLst>
-              <a:ext uri="{28A0092B-C50C-407E-A947-70E740481C1C}">
-                <a14:useLocalDpi xmlns:a14="http://schemas.microsoft.com/office/drawing/2010/main" val="0"/>
-              </a:ext>
-            </a:extLst>
-          </a:blip>
-          <a:srcRect t="29840"/>
-          <a:stretch/>
-        </p:blipFill>
-        <p:spPr bwMode="auto">
-          <a:xfrm>
-            <a:off x="1650230" y="962300"/>
-            <a:ext cx="9180298" cy="2130043"/>
-          </a:xfrm>
-          <a:prstGeom prst="rect">
-            <a:avLst/>
-          </a:prstGeom>
-          <a:noFill/>
-          <a:extLst>
-            <a:ext uri="{909E8E84-426E-40DD-AFC4-6F175D3DCCD1}">
-              <a14:hiddenFill xmlns:a14="http://schemas.microsoft.com/office/drawing/2010/main">
-                <a:solidFill>
-                  <a:srgbClr val="FFFFFF"/>
-                </a:solidFill>
-              </a14:hiddenFill>
-            </a:ext>
-          </a:extLst>
-        </p:spPr>
-      </p:pic>
       <p:sp>
         <p:nvSpPr>
           <p:cNvPr id="16" name="TextBox 15">
@@ -9428,15 +9386,15 @@
             <a:pPr algn="ctr"/>
             <a:r>
               <a:rPr lang="ru-RU" sz="2000" dirty="0" err="1">
-                <a:latin typeface="Arial" panose="020B0604020202020204" pitchFamily="34" charset="0"/>
-                <a:cs typeface="Arial" panose="020B0604020202020204" pitchFamily="34" charset="0"/>
+                <a:latin typeface="Times New Roman" panose="02020603050405020304" pitchFamily="18" charset="0"/>
+                <a:cs typeface="Times New Roman" panose="02020603050405020304" pitchFamily="18" charset="0"/>
               </a:rPr>
               <a:t>Ростов</a:t>
             </a:r>
             <a:r>
               <a:rPr lang="ru-RU" sz="2000" dirty="0">
-                <a:latin typeface="Arial" panose="020B0604020202020204" pitchFamily="34" charset="0"/>
-                <a:cs typeface="Arial" panose="020B0604020202020204" pitchFamily="34" charset="0"/>
+                <a:latin typeface="Times New Roman" panose="02020603050405020304" pitchFamily="18" charset="0"/>
+                <a:cs typeface="Times New Roman" panose="02020603050405020304" pitchFamily="18" charset="0"/>
               </a:rPr>
               <a:t>-на-Дону</a:t>
             </a:r>
@@ -9445,21 +9403,21 @@
             <a:pPr algn="ctr"/>
             <a:r>
               <a:rPr lang="ru-RU" sz="2000" dirty="0">
-                <a:latin typeface="Arial" panose="020B0604020202020204" pitchFamily="34" charset="0"/>
-                <a:cs typeface="Arial" panose="020B0604020202020204" pitchFamily="34" charset="0"/>
+                <a:latin typeface="Times New Roman" panose="02020603050405020304" pitchFamily="18" charset="0"/>
+                <a:cs typeface="Times New Roman" panose="02020603050405020304" pitchFamily="18" charset="0"/>
               </a:rPr>
               <a:t>202</a:t>
             </a:r>
             <a:r>
               <a:rPr lang="en-US" sz="2000" dirty="0">
-                <a:latin typeface="Arial" panose="020B0604020202020204" pitchFamily="34" charset="0"/>
-                <a:cs typeface="Arial" panose="020B0604020202020204" pitchFamily="34" charset="0"/>
+                <a:latin typeface="Times New Roman" panose="02020603050405020304" pitchFamily="18" charset="0"/>
+                <a:cs typeface="Times New Roman" panose="02020603050405020304" pitchFamily="18" charset="0"/>
               </a:rPr>
               <a:t>6</a:t>
             </a:r>
             <a:endParaRPr lang="ru-KZ" sz="2000" dirty="0">
-              <a:latin typeface="Arial" panose="020B0604020202020204" pitchFamily="34" charset="0"/>
-              <a:cs typeface="Arial" panose="020B0604020202020204" pitchFamily="34" charset="0"/>
+              <a:latin typeface="Times New Roman" panose="02020603050405020304" pitchFamily="18" charset="0"/>
+              <a:cs typeface="Times New Roman" panose="02020603050405020304" pitchFamily="18" charset="0"/>
             </a:endParaRPr>
           </a:p>
         </p:txBody>
@@ -9487,15 +9445,123 @@
           <a:p>
             <a:fld id="{C331B3CE-04B8-4F3A-B5D2-48A29AED5434}" type="slidenum">
               <a:rPr lang="ru-RU" smtClean="0">
-                <a:latin typeface="Arial" panose="020B0604020202020204" pitchFamily="34" charset="0"/>
-                <a:cs typeface="Arial" panose="020B0604020202020204" pitchFamily="34" charset="0"/>
+                <a:latin typeface="Times New Roman" panose="02020603050405020304" pitchFamily="18" charset="0"/>
+                <a:cs typeface="Times New Roman" panose="02020603050405020304" pitchFamily="18" charset="0"/>
               </a:rPr>
               <a:t>1</a:t>
             </a:fld>
             <a:endParaRPr lang="ru-RU">
-              <a:latin typeface="Arial" panose="020B0604020202020204" pitchFamily="34" charset="0"/>
-              <a:cs typeface="Arial" panose="020B0604020202020204" pitchFamily="34" charset="0"/>
+              <a:latin typeface="Times New Roman" panose="02020603050405020304" pitchFamily="18" charset="0"/>
+              <a:cs typeface="Times New Roman" panose="02020603050405020304" pitchFamily="18" charset="0"/>
             </a:endParaRPr>
+          </a:p>
+        </p:txBody>
+      </p:sp>
+      <p:sp>
+        <p:nvSpPr>
+          <p:cNvPr id="4" name="TextBox 3">
+            <a:extLst>
+              <a:ext uri="{FF2B5EF4-FFF2-40B4-BE49-F238E27FC236}">
+                <a16:creationId xmlns:a16="http://schemas.microsoft.com/office/drawing/2014/main" id="{6E612EF6-ACD5-1438-490F-3CC54E00B251}"/>
+              </a:ext>
+            </a:extLst>
+          </p:cNvPr>
+          <p:cNvSpPr txBox="1"/>
+          <p:nvPr/>
+        </p:nvSpPr>
+        <p:spPr>
+          <a:xfrm>
+            <a:off x="658091" y="1033260"/>
+            <a:ext cx="11756074" cy="400110"/>
+          </a:xfrm>
+          <a:prstGeom prst="rect">
+            <a:avLst/>
+          </a:prstGeom>
+          <a:noFill/>
+        </p:spPr>
+        <p:txBody>
+          <a:bodyPr wrap="square" rtlCol="0">
+            <a:spAutoFit/>
+          </a:bodyPr>
+          <a:lstStyle/>
+          <a:p>
+            <a:pPr algn="ctr"/>
+            <a:r>
+              <a:rPr lang="ru-RU" sz="2000" cap="all" dirty="0">
+                <a:latin typeface="Times New Roman" panose="02020603050405020304" pitchFamily="18" charset="0"/>
+                <a:cs typeface="Times New Roman" panose="02020603050405020304" pitchFamily="18" charset="0"/>
+              </a:rPr>
+              <a:t>Министерство науки и высшего образования российский федерации</a:t>
+            </a:r>
+          </a:p>
+        </p:txBody>
+      </p:sp>
+      <p:sp>
+        <p:nvSpPr>
+          <p:cNvPr id="5" name="TextBox 4">
+            <a:extLst>
+              <a:ext uri="{FF2B5EF4-FFF2-40B4-BE49-F238E27FC236}">
+                <a16:creationId xmlns:a16="http://schemas.microsoft.com/office/drawing/2014/main" id="{D3678E72-8806-B5B8-9BF8-C31841C7598B}"/>
+              </a:ext>
+            </a:extLst>
+          </p:cNvPr>
+          <p:cNvSpPr txBox="1"/>
+          <p:nvPr/>
+        </p:nvSpPr>
+        <p:spPr>
+          <a:xfrm>
+            <a:off x="872837" y="1441127"/>
+            <a:ext cx="10882745" cy="1323439"/>
+          </a:xfrm>
+          <a:prstGeom prst="rect">
+            <a:avLst/>
+          </a:prstGeom>
+          <a:noFill/>
+        </p:spPr>
+        <p:txBody>
+          <a:bodyPr wrap="square" rtlCol="0">
+            <a:spAutoFit/>
+          </a:bodyPr>
+          <a:lstStyle/>
+          <a:p>
+            <a:pPr algn="ctr"/>
+            <a:r>
+              <a:rPr lang="ru-RU" sz="2000" b="1" cap="all" dirty="0">
+                <a:latin typeface="Times New Roman" panose="02020603050405020304" pitchFamily="18" charset="0"/>
+                <a:cs typeface="Times New Roman" panose="02020603050405020304" pitchFamily="18" charset="0"/>
+              </a:rPr>
+              <a:t>Федеральное государственное бюджетное </a:t>
+            </a:r>
+          </a:p>
+          <a:p>
+            <a:pPr algn="ctr"/>
+            <a:r>
+              <a:rPr lang="ru-RU" sz="2000" b="1" cap="all" dirty="0">
+                <a:latin typeface="Times New Roman" panose="02020603050405020304" pitchFamily="18" charset="0"/>
+                <a:cs typeface="Times New Roman" panose="02020603050405020304" pitchFamily="18" charset="0"/>
+              </a:rPr>
+              <a:t>Образовательное учреждение высшего образования</a:t>
+            </a:r>
+          </a:p>
+          <a:p>
+            <a:pPr algn="ctr"/>
+            <a:r>
+              <a:rPr lang="ru-RU" sz="2000" b="1" cap="all" dirty="0">
+                <a:latin typeface="Times New Roman" panose="02020603050405020304" pitchFamily="18" charset="0"/>
+                <a:cs typeface="Times New Roman" panose="02020603050405020304" pitchFamily="18" charset="0"/>
+              </a:rPr>
+              <a:t>«донской государственный технический университет»</a:t>
+            </a:r>
+          </a:p>
+          <a:p>
+            <a:pPr algn="ctr"/>
+            <a:r>
+              <a:rPr lang="ru-RU" sz="2000" b="1" cap="all" dirty="0">
+                <a:latin typeface="Times New Roman" panose="02020603050405020304" pitchFamily="18" charset="0"/>
+                <a:cs typeface="Times New Roman" panose="02020603050405020304" pitchFamily="18" charset="0"/>
+              </a:rPr>
+              <a:t>(ДГТУ)</a:t>
+            </a:r>
           </a:p>
         </p:txBody>
       </p:sp>
@@ -12278,7 +12344,7 @@
         </p:nvSpPr>
         <p:spPr bwMode="auto">
           <a:xfrm>
-            <a:off x="838200" y="365125"/>
+            <a:off x="353291" y="133274"/>
             <a:ext cx="10515600" cy="1325563"/>
           </a:xfrm>
         </p:spPr>

--- a/docs/6k/diploma/prez/prez2.pptx
+++ b/docs/6k/diploma/prez/prez2.pptx
@@ -2317,247 +2317,6 @@
               </a:rPr>
               <a:t> помогает доработать тесты, решение или шаблон. </a:t>
             </a:r>
-            <a:br>
-              <a:rPr lang="ru-RU" sz="1200" kern="1200" dirty="0">
-                <a:solidFill>
-                  <a:schemeClr val="tx1"/>
-                </a:solidFill>
-                <a:effectLst/>
-                <a:latin typeface="+mn-lt"/>
-                <a:ea typeface="+mn-ea"/>
-                <a:cs typeface="+mn-cs"/>
-              </a:rPr>
-            </a:br>
-            <a:r>
-              <a:rPr lang="ru-RU" sz="1200" kern="1200" dirty="0">
-                <a:solidFill>
-                  <a:schemeClr val="tx1"/>
-                </a:solidFill>
-                <a:effectLst/>
-                <a:latin typeface="+mn-lt"/>
-                <a:ea typeface="+mn-ea"/>
-                <a:cs typeface="+mn-cs"/>
-              </a:rPr>
-              <a:t>Затем пользователь решает задачу в редакторе. В написании кода ему помогает языковой сервер. </a:t>
-            </a:r>
-            <a:br>
-              <a:rPr lang="ru-RU" sz="1200" kern="1200" dirty="0">
-                <a:solidFill>
-                  <a:schemeClr val="tx1"/>
-                </a:solidFill>
-                <a:effectLst/>
-                <a:latin typeface="+mn-lt"/>
-                <a:ea typeface="+mn-ea"/>
-                <a:cs typeface="+mn-cs"/>
-              </a:rPr>
-            </a:br>
-            <a:r>
-              <a:rPr lang="ru-RU" sz="1200" kern="1200" dirty="0">
-                <a:solidFill>
-                  <a:schemeClr val="tx1"/>
-                </a:solidFill>
-                <a:effectLst/>
-                <a:latin typeface="+mn-lt"/>
-                <a:ea typeface="+mn-ea"/>
-                <a:cs typeface="+mn-cs"/>
-              </a:rPr>
-              <a:t>Пользователь отправляет решение на проверку и получает результат асинхронно. </a:t>
-            </a:r>
-            <a:br>
-              <a:rPr lang="ru-RU" sz="1200" kern="1200" dirty="0">
-                <a:solidFill>
-                  <a:schemeClr val="tx1"/>
-                </a:solidFill>
-                <a:effectLst/>
-                <a:latin typeface="+mn-lt"/>
-                <a:ea typeface="+mn-ea"/>
-                <a:cs typeface="+mn-cs"/>
-              </a:rPr>
-            </a:br>
-            <a:r>
-              <a:rPr lang="ru-RU" sz="1200" kern="1200" dirty="0">
-                <a:solidFill>
-                  <a:schemeClr val="tx1"/>
-                </a:solidFill>
-                <a:effectLst/>
-                <a:latin typeface="+mn-lt"/>
-                <a:ea typeface="+mn-ea"/>
-                <a:cs typeface="+mn-cs"/>
-              </a:rPr>
-              <a:t>За этим пользовательским сценарием стоит уже показанная архитектура: хранение файлов в </a:t>
-            </a:r>
-            <a:r>
-              <a:rPr lang="ru-RU" sz="1200" kern="1200" dirty="0" err="1">
-                <a:solidFill>
-                  <a:schemeClr val="tx1"/>
-                </a:solidFill>
-                <a:effectLst/>
-                <a:latin typeface="+mn-lt"/>
-                <a:ea typeface="+mn-ea"/>
-                <a:cs typeface="+mn-cs"/>
-              </a:rPr>
-              <a:t>MinIO</a:t>
-            </a:r>
-            <a:r>
-              <a:rPr lang="ru-RU" sz="1200" kern="1200" dirty="0">
-                <a:solidFill>
-                  <a:schemeClr val="tx1"/>
-                </a:solidFill>
-                <a:effectLst/>
-                <a:latin typeface="+mn-lt"/>
-                <a:ea typeface="+mn-ea"/>
-                <a:cs typeface="+mn-cs"/>
-              </a:rPr>
-              <a:t>, проверка через </a:t>
-            </a:r>
-            <a:r>
-              <a:rPr lang="ru-RU" sz="1200" kern="1200" dirty="0" err="1">
-                <a:solidFill>
-                  <a:schemeClr val="tx1"/>
-                </a:solidFill>
-                <a:effectLst/>
-                <a:latin typeface="+mn-lt"/>
-                <a:ea typeface="+mn-ea"/>
-                <a:cs typeface="+mn-cs"/>
-              </a:rPr>
-              <a:t>Kafka</a:t>
-            </a:r>
-            <a:r>
-              <a:rPr lang="ru-RU" sz="1200" kern="1200" dirty="0">
-                <a:solidFill>
-                  <a:schemeClr val="tx1"/>
-                </a:solidFill>
-                <a:effectLst/>
-                <a:latin typeface="+mn-lt"/>
-                <a:ea typeface="+mn-ea"/>
-                <a:cs typeface="+mn-cs"/>
-              </a:rPr>
-              <a:t> и `</a:t>
-            </a:r>
-            <a:r>
-              <a:rPr lang="ru-RU" sz="1200" kern="1200" dirty="0" err="1">
-                <a:solidFill>
-                  <a:schemeClr val="tx1"/>
-                </a:solidFill>
-                <a:effectLst/>
-                <a:latin typeface="+mn-lt"/>
-                <a:ea typeface="+mn-ea"/>
-                <a:cs typeface="+mn-cs"/>
-              </a:rPr>
-              <a:t>test-runner</a:t>
-            </a:r>
-            <a:r>
-              <a:rPr lang="ru-RU" sz="1200" kern="1200" dirty="0">
-                <a:solidFill>
-                  <a:schemeClr val="tx1"/>
-                </a:solidFill>
-                <a:effectLst/>
-                <a:latin typeface="+mn-lt"/>
-                <a:ea typeface="+mn-ea"/>
-                <a:cs typeface="+mn-cs"/>
-              </a:rPr>
-              <a:t>`, запуск в </a:t>
-            </a:r>
-            <a:r>
-              <a:rPr lang="ru-RU" sz="1200" kern="1200" dirty="0" err="1">
-                <a:solidFill>
-                  <a:schemeClr val="tx1"/>
-                </a:solidFill>
-                <a:effectLst/>
-                <a:latin typeface="+mn-lt"/>
-                <a:ea typeface="+mn-ea"/>
-                <a:cs typeface="+mn-cs"/>
-              </a:rPr>
-              <a:t>Docker</a:t>
-            </a:r>
-            <a:r>
-              <a:rPr lang="ru-RU" sz="1200" kern="1200" dirty="0">
-                <a:solidFill>
-                  <a:schemeClr val="tx1"/>
-                </a:solidFill>
-                <a:effectLst/>
-                <a:latin typeface="+mn-lt"/>
-                <a:ea typeface="+mn-ea"/>
-                <a:cs typeface="+mn-cs"/>
-              </a:rPr>
-              <a:t> и сохранение результата.</a:t>
-            </a:r>
-            <a:br>
-              <a:rPr lang="ru-RU" sz="1200" kern="1200" dirty="0">
-                <a:solidFill>
-                  <a:schemeClr val="tx1"/>
-                </a:solidFill>
-                <a:effectLst/>
-                <a:latin typeface="+mn-lt"/>
-                <a:ea typeface="+mn-ea"/>
-                <a:cs typeface="+mn-cs"/>
-              </a:rPr>
-            </a:br>
-            <a:endParaRPr lang="ru-RU" sz="1200" kern="1200" dirty="0">
-              <a:solidFill>
-                <a:schemeClr val="tx1"/>
-              </a:solidFill>
-              <a:effectLst/>
-              <a:latin typeface="+mn-lt"/>
-              <a:ea typeface="+mn-ea"/>
-              <a:cs typeface="+mn-cs"/>
-            </a:endParaRPr>
-          </a:p>
-          <a:p>
-            <a:pPr marL="0" marR="0" lvl="0" indent="0" algn="l" defTabSz="914400" rtl="0" eaLnBrk="1" fontAlgn="auto" latinLnBrk="0" hangingPunct="1">
-              <a:lnSpc>
-                <a:spcPct val="100000"/>
-              </a:lnSpc>
-              <a:spcBef>
-                <a:spcPts val="0"/>
-              </a:spcBef>
-              <a:spcAft>
-                <a:spcPts val="0"/>
-              </a:spcAft>
-              <a:buClrTx/>
-              <a:buSzTx/>
-              <a:buFontTx/>
-              <a:buNone/>
-              <a:tabLst/>
-              <a:defRPr/>
-            </a:pPr>
-            <a:endParaRPr lang="ru-RU" sz="1200" kern="1200" dirty="0">
-              <a:solidFill>
-                <a:schemeClr val="tx1"/>
-              </a:solidFill>
-              <a:effectLst/>
-              <a:latin typeface="+mn-lt"/>
-              <a:ea typeface="+mn-ea"/>
-              <a:cs typeface="+mn-cs"/>
-            </a:endParaRPr>
-          </a:p>
-          <a:p>
-            <a:pPr marL="0" marR="0" lvl="0" indent="0" algn="l" defTabSz="914400" rtl="0" eaLnBrk="1" fontAlgn="auto" latinLnBrk="0" hangingPunct="1">
-              <a:lnSpc>
-                <a:spcPct val="100000"/>
-              </a:lnSpc>
-              <a:spcBef>
-                <a:spcPts val="0"/>
-              </a:spcBef>
-              <a:spcAft>
-                <a:spcPts val="0"/>
-              </a:spcAft>
-              <a:buClrTx/>
-              <a:buSzTx/>
-              <a:buFontTx/>
-              <a:buNone/>
-              <a:tabLst/>
-              <a:defRPr/>
-            </a:pPr>
-            <a:endParaRPr lang="ru-RU" sz="1200" kern="1200" dirty="0">
-              <a:solidFill>
-                <a:schemeClr val="tx1"/>
-              </a:solidFill>
-              <a:effectLst/>
-              <a:latin typeface="+mn-lt"/>
-              <a:ea typeface="+mn-ea"/>
-              <a:cs typeface="+mn-cs"/>
-            </a:endParaRPr>
           </a:p>
         </p:txBody>
       </p:sp>
@@ -2730,54 +2489,6 @@
               </a:rPr>
               <a:t> помогает доработать тесты, решение или шаблон. </a:t>
             </a:r>
-            <a:br>
-              <a:rPr lang="ru-RU" sz="1200" kern="1200" dirty="0">
-                <a:solidFill>
-                  <a:schemeClr val="tx1"/>
-                </a:solidFill>
-                <a:effectLst/>
-                <a:latin typeface="+mn-lt"/>
-                <a:ea typeface="+mn-ea"/>
-                <a:cs typeface="+mn-cs"/>
-              </a:rPr>
-            </a:br>
-            <a:endParaRPr lang="ru-RU" sz="1200" kern="1200" dirty="0">
-              <a:solidFill>
-                <a:schemeClr val="tx1"/>
-              </a:solidFill>
-              <a:effectLst/>
-              <a:latin typeface="+mn-lt"/>
-              <a:ea typeface="+mn-ea"/>
-              <a:cs typeface="+mn-cs"/>
-            </a:endParaRPr>
-          </a:p>
-          <a:p>
-            <a:pPr marL="0" marR="0" lvl="0" indent="0" algn="l" defTabSz="914400" rtl="0" eaLnBrk="1" fontAlgn="auto" latinLnBrk="0" hangingPunct="1">
-              <a:lnSpc>
-                <a:spcPct val="100000"/>
-              </a:lnSpc>
-              <a:spcBef>
-                <a:spcPts val="0"/>
-              </a:spcBef>
-              <a:spcAft>
-                <a:spcPts val="0"/>
-              </a:spcAft>
-              <a:buClrTx/>
-              <a:buSzTx/>
-              <a:buFontTx/>
-              <a:buNone/>
-              <a:tabLst/>
-              <a:defRPr/>
-            </a:pPr>
-            <a:endParaRPr lang="ru-RU" sz="1200" kern="1200" dirty="0">
-              <a:solidFill>
-                <a:schemeClr val="tx1"/>
-              </a:solidFill>
-              <a:effectLst/>
-              <a:latin typeface="+mn-lt"/>
-              <a:ea typeface="+mn-ea"/>
-              <a:cs typeface="+mn-cs"/>
-            </a:endParaRPr>
           </a:p>
         </p:txBody>
       </p:sp>
@@ -2914,168 +2625,6 @@
               </a:rPr>
               <a:t>Затем пользователь решает задачу в редакторе. В написании кода ему помогает языковой сервер. </a:t>
             </a:r>
-            <a:br>
-              <a:rPr lang="ru-RU" sz="1200" kern="1200" dirty="0">
-                <a:solidFill>
-                  <a:schemeClr val="tx1"/>
-                </a:solidFill>
-                <a:effectLst/>
-                <a:latin typeface="+mn-lt"/>
-                <a:ea typeface="+mn-ea"/>
-                <a:cs typeface="+mn-cs"/>
-              </a:rPr>
-            </a:br>
-            <a:r>
-              <a:rPr lang="ru-RU" sz="1200" kern="1200" dirty="0">
-                <a:solidFill>
-                  <a:schemeClr val="tx1"/>
-                </a:solidFill>
-                <a:effectLst/>
-                <a:latin typeface="+mn-lt"/>
-                <a:ea typeface="+mn-ea"/>
-                <a:cs typeface="+mn-cs"/>
-              </a:rPr>
-              <a:t>Пользователь отправляет решение на проверку и получает результат асинхронно. </a:t>
-            </a:r>
-            <a:br>
-              <a:rPr lang="ru-RU" sz="1200" kern="1200" dirty="0">
-                <a:solidFill>
-                  <a:schemeClr val="tx1"/>
-                </a:solidFill>
-                <a:effectLst/>
-                <a:latin typeface="+mn-lt"/>
-                <a:ea typeface="+mn-ea"/>
-                <a:cs typeface="+mn-cs"/>
-              </a:rPr>
-            </a:br>
-            <a:r>
-              <a:rPr lang="ru-RU" sz="1200" kern="1200" dirty="0">
-                <a:solidFill>
-                  <a:schemeClr val="tx1"/>
-                </a:solidFill>
-                <a:effectLst/>
-                <a:latin typeface="+mn-lt"/>
-                <a:ea typeface="+mn-ea"/>
-                <a:cs typeface="+mn-cs"/>
-              </a:rPr>
-              <a:t>За этим пользовательским сценарием стоит уже показанная архитектура: хранение файлов в </a:t>
-            </a:r>
-            <a:r>
-              <a:rPr lang="ru-RU" sz="1200" kern="1200" dirty="0" err="1">
-                <a:solidFill>
-                  <a:schemeClr val="tx1"/>
-                </a:solidFill>
-                <a:effectLst/>
-                <a:latin typeface="+mn-lt"/>
-                <a:ea typeface="+mn-ea"/>
-                <a:cs typeface="+mn-cs"/>
-              </a:rPr>
-              <a:t>MinIO</a:t>
-            </a:r>
-            <a:r>
-              <a:rPr lang="ru-RU" sz="1200" kern="1200" dirty="0">
-                <a:solidFill>
-                  <a:schemeClr val="tx1"/>
-                </a:solidFill>
-                <a:effectLst/>
-                <a:latin typeface="+mn-lt"/>
-                <a:ea typeface="+mn-ea"/>
-                <a:cs typeface="+mn-cs"/>
-              </a:rPr>
-              <a:t>, проверка через </a:t>
-            </a:r>
-            <a:r>
-              <a:rPr lang="ru-RU" sz="1200" kern="1200" dirty="0" err="1">
-                <a:solidFill>
-                  <a:schemeClr val="tx1"/>
-                </a:solidFill>
-                <a:effectLst/>
-                <a:latin typeface="+mn-lt"/>
-                <a:ea typeface="+mn-ea"/>
-                <a:cs typeface="+mn-cs"/>
-              </a:rPr>
-              <a:t>Kafka</a:t>
-            </a:r>
-            <a:r>
-              <a:rPr lang="ru-RU" sz="1200" kern="1200" dirty="0">
-                <a:solidFill>
-                  <a:schemeClr val="tx1"/>
-                </a:solidFill>
-                <a:effectLst/>
-                <a:latin typeface="+mn-lt"/>
-                <a:ea typeface="+mn-ea"/>
-                <a:cs typeface="+mn-cs"/>
-              </a:rPr>
-              <a:t> и `</a:t>
-            </a:r>
-            <a:r>
-              <a:rPr lang="ru-RU" sz="1200" kern="1200" dirty="0" err="1">
-                <a:solidFill>
-                  <a:schemeClr val="tx1"/>
-                </a:solidFill>
-                <a:effectLst/>
-                <a:latin typeface="+mn-lt"/>
-                <a:ea typeface="+mn-ea"/>
-                <a:cs typeface="+mn-cs"/>
-              </a:rPr>
-              <a:t>test-runner</a:t>
-            </a:r>
-            <a:r>
-              <a:rPr lang="ru-RU" sz="1200" kern="1200" dirty="0">
-                <a:solidFill>
-                  <a:schemeClr val="tx1"/>
-                </a:solidFill>
-                <a:effectLst/>
-                <a:latin typeface="+mn-lt"/>
-                <a:ea typeface="+mn-ea"/>
-                <a:cs typeface="+mn-cs"/>
-              </a:rPr>
-              <a:t>`, запуск в </a:t>
-            </a:r>
-            <a:r>
-              <a:rPr lang="ru-RU" sz="1200" kern="1200" dirty="0" err="1">
-                <a:solidFill>
-                  <a:schemeClr val="tx1"/>
-                </a:solidFill>
-                <a:effectLst/>
-                <a:latin typeface="+mn-lt"/>
-                <a:ea typeface="+mn-ea"/>
-                <a:cs typeface="+mn-cs"/>
-              </a:rPr>
-              <a:t>Docker</a:t>
-            </a:r>
-            <a:r>
-              <a:rPr lang="ru-RU" sz="1200" kern="1200" dirty="0">
-                <a:solidFill>
-                  <a:schemeClr val="tx1"/>
-                </a:solidFill>
-                <a:effectLst/>
-                <a:latin typeface="+mn-lt"/>
-                <a:ea typeface="+mn-ea"/>
-                <a:cs typeface="+mn-cs"/>
-              </a:rPr>
-              <a:t> и сохранение результата.</a:t>
-            </a:r>
-            <a:br>
-              <a:rPr lang="ru-RU" sz="1200" kern="1200" dirty="0">
-                <a:solidFill>
-                  <a:schemeClr val="tx1"/>
-                </a:solidFill>
-                <a:effectLst/>
-                <a:latin typeface="+mn-lt"/>
-                <a:ea typeface="+mn-ea"/>
-                <a:cs typeface="+mn-cs"/>
-              </a:rPr>
-            </a:br>
-            <a:endParaRPr lang="ru-RU" sz="1200" kern="1200" dirty="0">
-              <a:solidFill>
-                <a:schemeClr val="tx1"/>
-              </a:solidFill>
-              <a:effectLst/>
-              <a:latin typeface="+mn-lt"/>
-              <a:ea typeface="+mn-ea"/>
-              <a:cs typeface="+mn-cs"/>
-            </a:endParaRPr>
           </a:p>
         </p:txBody>
       </p:sp>
@@ -3200,29 +2749,6 @@
               <a:tabLst/>
               <a:defRPr/>
             </a:pPr>
-            <a:r>
-              <a:rPr lang="ru-RU" sz="1200" kern="1200" dirty="0">
-                <a:solidFill>
-                  <a:schemeClr val="tx1"/>
-                </a:solidFill>
-                <a:effectLst/>
-                <a:latin typeface="+mn-lt"/>
-                <a:ea typeface="+mn-ea"/>
-                <a:cs typeface="+mn-cs"/>
-              </a:rPr>
-              <a:t>Затем пользователь решает задачу в редакторе. В написании кода ему помогает языковой сервер. </a:t>
-            </a:r>
-            <a:br>
-              <a:rPr lang="ru-RU" sz="1200" kern="1200" dirty="0">
-                <a:solidFill>
-                  <a:schemeClr val="tx1"/>
-                </a:solidFill>
-                <a:effectLst/>
-                <a:latin typeface="+mn-lt"/>
-                <a:ea typeface="+mn-ea"/>
-                <a:cs typeface="+mn-cs"/>
-              </a:rPr>
-            </a:br>
             <a:r>
               <a:rPr lang="ru-RU" sz="1200" kern="1200" dirty="0">
                 <a:solidFill>
@@ -3463,10 +2989,7 @@
           <a:bodyPr/>
           <a:lstStyle/>
           <a:p>
-            <a:r>
-              <a:rPr lang="ru-RU" dirty="0"/>
-              <a:t>Основная часть с которой взаимодействует пользователь – это </a:t>
-            </a:r>
+            <a:endParaRPr lang="ru-RU" dirty="0"/>
           </a:p>
         </p:txBody>
       </p:sp>
@@ -3485,9 +3008,9 @@
           <a:bodyPr/>
           <a:lstStyle/>
           <a:p>
-            <a:fld id="{3C856498-E8B5-470F-95E1-112A97B3DC69}" type="slidenum">
+            <a:fld id="{A80DC325-56CE-4D5F-8FC4-F9ED44DCC9D1}" type="slidenum">
               <a:rPr lang="ru-RU" smtClean="0"/>
-              <a:t>20</a:t>
+              <a:t>19</a:t>
             </a:fld>
             <a:endParaRPr lang="ru-RU"/>
           </a:p>
@@ -3496,7 +3019,7 @@
     </p:spTree>
     <p:extLst>
       <p:ext uri="{BB962C8B-B14F-4D97-AF65-F5344CB8AC3E}">
-        <p14:creationId xmlns:p14="http://schemas.microsoft.com/office/powerpoint/2010/main" val="1353313741"/>
+        <p14:creationId xmlns:p14="http://schemas.microsoft.com/office/powerpoint/2010/main" val="3460630409"/>
       </p:ext>
     </p:extLst>
   </p:cSld>
@@ -3580,40 +3103,6 @@
               <a:t>Онлайн-платформы для задач по программированию востребованы в обучении и самостоятельной подготовке.</a:t>
             </a:r>
           </a:p>
-          <a:p>
-            <a:pPr marL="0" marR="0" lvl="0" indent="0" algn="l" defTabSz="914400" rtl="0" eaLnBrk="1" fontAlgn="auto" latinLnBrk="0" hangingPunct="1">
-              <a:lnSpc>
-                <a:spcPct val="100000"/>
-              </a:lnSpc>
-              <a:spcBef>
-                <a:spcPts val="0"/>
-              </a:spcBef>
-              <a:spcAft>
-                <a:spcPts val="0"/>
-              </a:spcAft>
-              <a:buClrTx/>
-              <a:buSzTx/>
-              <a:buFontTx/>
-              <a:buNone/>
-              <a:tabLst/>
-              <a:defRPr/>
-            </a:pPr>
-            <a:r>
-              <a:rPr lang="ru-RU" sz="1200" kern="1200" dirty="0">
-                <a:solidFill>
-                  <a:schemeClr val="tx1"/>
-                </a:solidFill>
-                <a:effectLst/>
-                <a:latin typeface="+mn-lt"/>
-                <a:ea typeface="+mn-ea"/>
-                <a:cs typeface="+mn-cs"/>
-              </a:rPr>
-              <a:t>Цель работы была связана с развитием уже существующей базовой платформы, которую я разработал в бакалавриате. </a:t>
-            </a:r>
-          </a:p>
-          <a:p>
-            <a:endParaRPr lang="ru-RU" dirty="0"/>
-          </a:p>
         </p:txBody>
       </p:sp>
       <p:sp>
@@ -3643,6 +3132,93 @@
     <p:extLst>
       <p:ext uri="{BB962C8B-B14F-4D97-AF65-F5344CB8AC3E}">
         <p14:creationId xmlns:p14="http://schemas.microsoft.com/office/powerpoint/2010/main" val="1616472264"/>
+      </p:ext>
+    </p:extLst>
+  </p:cSld>
+  <p:clrMapOvr>
+    <a:masterClrMapping/>
+  </p:clrMapOvr>
+</p:notes>
+</file>
+
+<file path=ppt/notesSlides/notesSlide20.xml><?xml version="1.0" encoding="utf-8"?>
+<p:notes xmlns:a="http://schemas.openxmlformats.org/drawingml/2006/main" xmlns:r="http://schemas.openxmlformats.org/officeDocument/2006/relationships" xmlns:p="http://schemas.openxmlformats.org/presentationml/2006/main">
+  <p:cSld>
+    <p:spTree>
+      <p:nvGrpSpPr>
+        <p:cNvPr id="1" name=""/>
+        <p:cNvGrpSpPr/>
+        <p:nvPr/>
+      </p:nvGrpSpPr>
+      <p:grpSpPr>
+        <a:xfrm>
+          <a:off x="0" y="0"/>
+          <a:ext cx="0" cy="0"/>
+          <a:chOff x="0" y="0"/>
+          <a:chExt cx="0" cy="0"/>
+        </a:xfrm>
+      </p:grpSpPr>
+      <p:sp>
+        <p:nvSpPr>
+          <p:cNvPr id="2" name="Образ слайда 1"/>
+          <p:cNvSpPr>
+            <a:spLocks noGrp="1" noRot="1" noChangeAspect="1"/>
+          </p:cNvSpPr>
+          <p:nvPr>
+            <p:ph type="sldImg"/>
+          </p:nvPr>
+        </p:nvSpPr>
+        <p:spPr/>
+      </p:sp>
+      <p:sp>
+        <p:nvSpPr>
+          <p:cNvPr id="3" name="Заметки 2"/>
+          <p:cNvSpPr>
+            <a:spLocks noGrp="1"/>
+          </p:cNvSpPr>
+          <p:nvPr>
+            <p:ph type="body" idx="1"/>
+          </p:nvPr>
+        </p:nvSpPr>
+        <p:spPr/>
+        <p:txBody>
+          <a:bodyPr/>
+          <a:lstStyle/>
+          <a:p>
+            <a:r>
+              <a:rPr lang="ru-RU" dirty="0"/>
+              <a:t>Основная часть с которой взаимодействует пользователь – это </a:t>
+            </a:r>
+          </a:p>
+        </p:txBody>
+      </p:sp>
+      <p:sp>
+        <p:nvSpPr>
+          <p:cNvPr id="4" name="Номер слайда 3"/>
+          <p:cNvSpPr>
+            <a:spLocks noGrp="1"/>
+          </p:cNvSpPr>
+          <p:nvPr>
+            <p:ph type="sldNum" sz="quarter" idx="5"/>
+          </p:nvPr>
+        </p:nvSpPr>
+        <p:spPr/>
+        <p:txBody>
+          <a:bodyPr/>
+          <a:lstStyle/>
+          <a:p>
+            <a:fld id="{3C856498-E8B5-470F-95E1-112A97B3DC69}" type="slidenum">
+              <a:rPr lang="ru-RU" smtClean="0"/>
+              <a:t>20</a:t>
+            </a:fld>
+            <a:endParaRPr lang="ru-RU"/>
+          </a:p>
+        </p:txBody>
+      </p:sp>
+    </p:spTree>
+    <p:extLst>
+      <p:ext uri="{BB962C8B-B14F-4D97-AF65-F5344CB8AC3E}">
+        <p14:creationId xmlns:p14="http://schemas.microsoft.com/office/powerpoint/2010/main" val="1353313741"/>
       </p:ext>
     </p:extLst>
   </p:cSld>
@@ -3695,6 +3271,46 @@
         <p:txBody>
           <a:bodyPr/>
           <a:lstStyle/>
+          <a:p>
+            <a:pPr marL="0" marR="0" lvl="0" indent="0" algn="l" defTabSz="914400" rtl="0" eaLnBrk="1" fontAlgn="auto" latinLnBrk="0" hangingPunct="1">
+              <a:lnSpc>
+                <a:spcPct val="100000"/>
+              </a:lnSpc>
+              <a:spcBef>
+                <a:spcPts val="0"/>
+              </a:spcBef>
+              <a:spcAft>
+                <a:spcPts val="0"/>
+              </a:spcAft>
+              <a:buClrTx/>
+              <a:buSzTx/>
+              <a:buFontTx/>
+              <a:buNone/>
+              <a:tabLst/>
+              <a:defRPr/>
+            </a:pPr>
+            <a:r>
+              <a:rPr lang="ru-RU" sz="1200" kern="1200" dirty="0">
+                <a:solidFill>
+                  <a:schemeClr val="tx1"/>
+                </a:solidFill>
+                <a:effectLst/>
+                <a:latin typeface="+mn-lt"/>
+                <a:ea typeface="+mn-ea"/>
+                <a:cs typeface="+mn-cs"/>
+              </a:rPr>
+              <a:t>Цель работы связана с развитием уже существующей базовой платформы, которую я разработал в бакалавриате. </a:t>
+            </a:r>
+            <a:endParaRPr lang="en-US" sz="1200" kern="1200" dirty="0">
+              <a:solidFill>
+                <a:schemeClr val="tx1"/>
+              </a:solidFill>
+              <a:effectLst/>
+              <a:latin typeface="+mn-lt"/>
+              <a:ea typeface="+mn-ea"/>
+              <a:cs typeface="+mn-cs"/>
+            </a:endParaRPr>
+          </a:p>
           <a:p>
             <a:pPr marL="0" marR="0" lvl="0" indent="0" algn="l" defTabSz="914400" rtl="0" eaLnBrk="1" fontAlgn="auto" latinLnBrk="0" hangingPunct="1">
               <a:lnSpc>
@@ -9689,8 +9305,8 @@
         </p:blipFill>
         <p:spPr>
           <a:xfrm>
-            <a:off x="293844" y="1358659"/>
-            <a:ext cx="6849431" cy="4686954"/>
+            <a:off x="258125" y="994326"/>
+            <a:ext cx="7974001" cy="5456479"/>
           </a:xfrm>
           <a:prstGeom prst="rect">
             <a:avLst/>
@@ -9899,7 +9515,7 @@
         </p:nvSpPr>
         <p:spPr>
           <a:xfrm>
-            <a:off x="2660284" y="2809363"/>
+            <a:off x="2705543" y="2918684"/>
             <a:ext cx="1388192" cy="369332"/>
           </a:xfrm>
           <a:prstGeom prst="rect">
@@ -11362,7 +10978,7 @@
         <p:spPr>
           <a:xfrm>
             <a:off x="160020" y="4937348"/>
-            <a:ext cx="5171778" cy="954107"/>
+            <a:ext cx="5390674" cy="523220"/>
           </a:xfrm>
           <a:prstGeom prst="rect">
             <a:avLst/>
@@ -22008,14 +21624,12 @@
           </p:cNvPr>
           <p:cNvCxnSpPr>
             <a:cxnSpLocks/>
-            <a:stCxn id="21" idx="2"/>
-            <a:endCxn id="106" idx="0"/>
           </p:cNvCxnSpPr>
           <p:nvPr/>
         </p:nvCxnSpPr>
         <p:spPr>
           <a:xfrm rot="5400000">
-            <a:off x="9984874" y="3254195"/>
+            <a:off x="9162850" y="3235329"/>
             <a:ext cx="1252874" cy="1"/>
           </a:xfrm>
           <a:prstGeom prst="bentConnector3">
@@ -22042,6 +21656,125 @@
           </a:fontRef>
         </p:style>
       </p:cxnSp>
+      <p:cxnSp>
+        <p:nvCxnSpPr>
+          <p:cNvPr id="3" name="Соединитель: уступ 2">
+            <a:extLst>
+              <a:ext uri="{FF2B5EF4-FFF2-40B4-BE49-F238E27FC236}">
+                <a16:creationId xmlns:a16="http://schemas.microsoft.com/office/drawing/2014/main" id="{08AE3549-4AD2-5654-D4B0-0AA2AC3CAD94}"/>
+              </a:ext>
+            </a:extLst>
+          </p:cNvPr>
+          <p:cNvCxnSpPr>
+            <a:cxnSpLocks/>
+          </p:cNvCxnSpPr>
+          <p:nvPr/>
+        </p:nvCxnSpPr>
+        <p:spPr>
+          <a:xfrm rot="16200000" flipV="1">
+            <a:off x="10793582" y="3231073"/>
+            <a:ext cx="1244366" cy="3"/>
+          </a:xfrm>
+          <a:prstGeom prst="bentConnector3">
+            <a:avLst>
+              <a:gd name="adj1" fmla="val 50000"/>
+            </a:avLst>
+          </a:prstGeom>
+          <a:ln w="57150">
+            <a:tailEnd type="triangle"/>
+          </a:ln>
+        </p:spPr>
+        <p:style>
+          <a:lnRef idx="2">
+            <a:schemeClr val="accent1"/>
+          </a:lnRef>
+          <a:fillRef idx="0">
+            <a:schemeClr val="accent1"/>
+          </a:fillRef>
+          <a:effectRef idx="1">
+            <a:schemeClr val="accent1"/>
+          </a:effectRef>
+          <a:fontRef idx="minor">
+            <a:schemeClr val="tx1"/>
+          </a:fontRef>
+        </p:style>
+      </p:cxnSp>
+      <p:sp>
+        <p:nvSpPr>
+          <p:cNvPr id="13" name="TextBox 12">
+            <a:extLst>
+              <a:ext uri="{FF2B5EF4-FFF2-40B4-BE49-F238E27FC236}">
+                <a16:creationId xmlns:a16="http://schemas.microsoft.com/office/drawing/2014/main" id="{5CF4DF4E-B653-84CF-D7B1-CAE2FA86069B}"/>
+              </a:ext>
+            </a:extLst>
+          </p:cNvPr>
+          <p:cNvSpPr txBox="1"/>
+          <p:nvPr/>
+        </p:nvSpPr>
+        <p:spPr>
+          <a:xfrm>
+            <a:off x="9780793" y="2678942"/>
+            <a:ext cx="1154546" cy="369332"/>
+          </a:xfrm>
+          <a:prstGeom prst="rect">
+            <a:avLst/>
+          </a:prstGeom>
+          <a:noFill/>
+        </p:spPr>
+        <p:txBody>
+          <a:bodyPr wrap="square" rtlCol="0">
+            <a:spAutoFit/>
+          </a:bodyPr>
+          <a:lstStyle/>
+          <a:p>
+            <a:r>
+              <a:rPr lang="ru-RU" dirty="0">
+                <a:latin typeface="Arial" panose="020B0604020202020204" pitchFamily="34" charset="0"/>
+                <a:cs typeface="Arial" panose="020B0604020202020204" pitchFamily="34" charset="0"/>
+              </a:rPr>
+              <a:t>решение</a:t>
+            </a:r>
+          </a:p>
+        </p:txBody>
+      </p:sp>
+      <p:sp>
+        <p:nvSpPr>
+          <p:cNvPr id="29" name="TextBox 28">
+            <a:extLst>
+              <a:ext uri="{FF2B5EF4-FFF2-40B4-BE49-F238E27FC236}">
+                <a16:creationId xmlns:a16="http://schemas.microsoft.com/office/drawing/2014/main" id="{C7FF79AD-137E-8014-732A-45DED40D262B}"/>
+              </a:ext>
+            </a:extLst>
+          </p:cNvPr>
+          <p:cNvSpPr txBox="1"/>
+          <p:nvPr/>
+        </p:nvSpPr>
+        <p:spPr>
+          <a:xfrm>
+            <a:off x="10695965" y="3492435"/>
+            <a:ext cx="797300" cy="369332"/>
+          </a:xfrm>
+          <a:prstGeom prst="rect">
+            <a:avLst/>
+          </a:prstGeom>
+          <a:noFill/>
+        </p:spPr>
+        <p:txBody>
+          <a:bodyPr wrap="square" rtlCol="0">
+            <a:spAutoFit/>
+          </a:bodyPr>
+          <a:lstStyle/>
+          <a:p>
+            <a:r>
+              <a:rPr lang="ru-RU" dirty="0">
+                <a:latin typeface="Arial" panose="020B0604020202020204" pitchFamily="34" charset="0"/>
+                <a:cs typeface="Arial" panose="020B0604020202020204" pitchFamily="34" charset="0"/>
+              </a:rPr>
+              <a:t>отчет</a:t>
+            </a:r>
+          </a:p>
+        </p:txBody>
+      </p:sp>
     </p:spTree>
     <p:extLst>
       <p:ext uri="{BB962C8B-B14F-4D97-AF65-F5344CB8AC3E}">

--- a/docs/6k/diploma/prez/prez2.pptx
+++ b/docs/6k/diploma/prez/prez2.pptx
@@ -246,7 +246,7 @@
           <a:p>
             <a:fld id="{5632EB05-EC61-4B7F-939D-F86C35DFD879}" type="datetimeFigureOut">
               <a:rPr lang="ru-RU" smtClean="0"/>
-              <a:t>11.06.2026</a:t>
+              <a:t>18.06.2026</a:t>
             </a:fld>
             <a:endParaRPr lang="ru-RU"/>
           </a:p>
@@ -3103,6 +3103,70 @@
               <a:t>Онлайн-платформы для задач по программированию востребованы в обучении и самостоятельной подготовке.</a:t>
             </a:r>
           </a:p>
+          <a:p>
+            <a:pPr marL="0" marR="0" lvl="0" indent="0" algn="l" defTabSz="914400" rtl="0" eaLnBrk="1" fontAlgn="auto" latinLnBrk="0" hangingPunct="1">
+              <a:lnSpc>
+                <a:spcPct val="100000"/>
+              </a:lnSpc>
+              <a:spcBef>
+                <a:spcPts val="0"/>
+              </a:spcBef>
+              <a:spcAft>
+                <a:spcPts val="0"/>
+              </a:spcAft>
+              <a:buClrTx/>
+              <a:buSzTx/>
+              <a:buFontTx/>
+              <a:buNone/>
+              <a:tabLst/>
+              <a:defRPr/>
+            </a:pPr>
+            <a:endParaRPr lang="ru-RU" sz="1200" kern="1200" dirty="0">
+              <a:solidFill>
+                <a:schemeClr val="tx1"/>
+              </a:solidFill>
+              <a:effectLst/>
+              <a:latin typeface="+mn-lt"/>
+              <a:ea typeface="+mn-ea"/>
+              <a:cs typeface="+mn-cs"/>
+            </a:endParaRPr>
+          </a:p>
+          <a:p>
+            <a:pPr marL="0" marR="0" lvl="0" indent="0" algn="l" defTabSz="914400" rtl="0" eaLnBrk="1" fontAlgn="auto" latinLnBrk="0" hangingPunct="1">
+              <a:lnSpc>
+                <a:spcPct val="100000"/>
+              </a:lnSpc>
+              <a:spcBef>
+                <a:spcPts val="0"/>
+              </a:spcBef>
+              <a:spcAft>
+                <a:spcPts val="0"/>
+              </a:spcAft>
+              <a:buClrTx/>
+              <a:buSzTx/>
+              <a:buFontTx/>
+              <a:buNone/>
+              <a:tabLst/>
+              <a:defRPr/>
+            </a:pPr>
+            <a:r>
+              <a:rPr lang="ru-RU" b="1" dirty="0"/>
+              <a:t>Актуальность темы обусловлена</a:t>
+            </a:r>
+            <a:r>
+              <a:rPr lang="ru-RU" dirty="0"/>
+              <a:t> необходимостью повышения эффективности организации практического обучения программированию за счёт автоматизации проверки решений, систематизации набора заданий, фиксации результатов выполнения и предоставления обучающимся оперативной обратной связи.</a:t>
+            </a:r>
+            <a:endParaRPr lang="ru-RU" sz="1200" kern="1200" dirty="0">
+              <a:solidFill>
+                <a:schemeClr val="tx1"/>
+              </a:solidFill>
+              <a:effectLst/>
+              <a:latin typeface="+mn-lt"/>
+              <a:ea typeface="+mn-ea"/>
+              <a:cs typeface="+mn-cs"/>
+            </a:endParaRPr>
+          </a:p>
         </p:txBody>
       </p:sp>
       <p:sp>
@@ -5634,7 +5698,7 @@
           <a:p>
             <a:fld id="{A30F36FB-60D2-4591-91B1-494ED38C6BD1}" type="datetime1">
               <a:rPr lang="ru-RU" smtClean="0"/>
-              <a:t>11.06.2026</a:t>
+              <a:t>18.06.2026</a:t>
             </a:fld>
             <a:endParaRPr lang="ru-RU"/>
           </a:p>
@@ -5842,7 +5906,7 @@
           <a:p>
             <a:fld id="{8265BE88-034B-45D5-A944-94F3A3054064}" type="datetime1">
               <a:rPr lang="ru-RU" smtClean="0"/>
-              <a:t>11.06.2026</a:t>
+              <a:t>18.06.2026</a:t>
             </a:fld>
             <a:endParaRPr lang="ru-RU"/>
           </a:p>
@@ -6050,7 +6114,7 @@
           <a:p>
             <a:fld id="{F48D88AA-06F5-4B86-89B9-99EC2B8F7434}" type="datetime1">
               <a:rPr lang="ru-RU" smtClean="0"/>
-              <a:t>11.06.2026</a:t>
+              <a:t>18.06.2026</a:t>
             </a:fld>
             <a:endParaRPr lang="ru-RU"/>
           </a:p>
@@ -6248,7 +6312,7 @@
           <a:p>
             <a:fld id="{8D895572-F86B-4AAF-9901-DBEA81AB7ACD}" type="datetime1">
               <a:rPr lang="ru-RU" smtClean="0"/>
-              <a:t>11.06.2026</a:t>
+              <a:t>18.06.2026</a:t>
             </a:fld>
             <a:endParaRPr lang="ru-RU"/>
           </a:p>
@@ -6533,7 +6597,7 @@
           <a:p>
             <a:fld id="{DE023FC0-79C6-44ED-8998-3FF0C40B5FA2}" type="datetime1">
               <a:rPr lang="ru-RU" smtClean="0"/>
-              <a:t>11.06.2026</a:t>
+              <a:t>18.06.2026</a:t>
             </a:fld>
             <a:endParaRPr lang="ru-RU"/>
           </a:p>
@@ -6808,7 +6872,7 @@
           <a:p>
             <a:fld id="{7F67BB7B-30EB-4876-90DB-AE0CD21537F2}" type="datetime1">
               <a:rPr lang="ru-RU" smtClean="0"/>
-              <a:t>11.06.2026</a:t>
+              <a:t>18.06.2026</a:t>
             </a:fld>
             <a:endParaRPr lang="ru-RU"/>
           </a:p>
@@ -7220,7 +7284,7 @@
           <a:p>
             <a:fld id="{0A4A23B3-65EC-4DB2-BE01-9137E4C731B5}" type="datetime1">
               <a:rPr lang="ru-RU" smtClean="0"/>
-              <a:t>11.06.2026</a:t>
+              <a:t>18.06.2026</a:t>
             </a:fld>
             <a:endParaRPr lang="ru-RU"/>
           </a:p>
@@ -7361,7 +7425,7 @@
           <a:p>
             <a:fld id="{E61F492F-F41F-4E9E-B4F0-FE1D345FAC77}" type="datetime1">
               <a:rPr lang="ru-RU" smtClean="0"/>
-              <a:t>11.06.2026</a:t>
+              <a:t>18.06.2026</a:t>
             </a:fld>
             <a:endParaRPr lang="ru-RU"/>
           </a:p>
@@ -7484,7 +7548,7 @@
           <a:p>
             <a:fld id="{6A726D96-835C-4F41-BEB4-A4AD62CA6291}" type="datetime1">
               <a:rPr lang="ru-RU" smtClean="0"/>
-              <a:t>11.06.2026</a:t>
+              <a:t>18.06.2026</a:t>
             </a:fld>
             <a:endParaRPr lang="ru-RU"/>
           </a:p>
@@ -7795,7 +7859,7 @@
           <a:p>
             <a:fld id="{A2820B7B-54F2-43ED-8454-A2A4DAA3A1C5}" type="datetime1">
               <a:rPr lang="ru-RU" smtClean="0"/>
-              <a:t>11.06.2026</a:t>
+              <a:t>18.06.2026</a:t>
             </a:fld>
             <a:endParaRPr lang="ru-RU"/>
           </a:p>
@@ -8083,7 +8147,7 @@
           <a:p>
             <a:fld id="{8E82C1E6-D228-4BC0-AF51-CF5CA9AEE0BB}" type="datetime1">
               <a:rPr lang="ru-RU" smtClean="0"/>
-              <a:t>11.06.2026</a:t>
+              <a:t>18.06.2026</a:t>
             </a:fld>
             <a:endParaRPr lang="ru-RU"/>
           </a:p>
@@ -8324,7 +8388,7 @@
           <a:p>
             <a:fld id="{28610270-3E98-416C-AE29-5456650D1D8B}" type="datetime1">
               <a:rPr lang="ru-RU" smtClean="0"/>
-              <a:t>11.06.2026</a:t>
+              <a:t>18.06.2026</a:t>
             </a:fld>
             <a:endParaRPr lang="ru-RU"/>
           </a:p>
@@ -11844,7 +11908,7 @@
                 <a:latin typeface="Arial" panose="020B0604020202020204" pitchFamily="34" charset="0"/>
                 <a:cs typeface="Arial" panose="020B0604020202020204" pitchFamily="34" charset="0"/>
               </a:rPr>
-              <a:t>Хранение задач и решений реализовано</a:t>
+              <a:t>Проверка решений и поддержка языков расширены</a:t>
             </a:r>
           </a:p>
           <a:p>
@@ -11853,7 +11917,7 @@
                 <a:latin typeface="Arial" panose="020B0604020202020204" pitchFamily="34" charset="0"/>
                 <a:cs typeface="Arial" panose="020B0604020202020204" pitchFamily="34" charset="0"/>
               </a:rPr>
-              <a:t>Проверка решений и поддержка языков расширены</a:t>
+              <a:t>Реализовано редактирование задач с помощью ИИ</a:t>
             </a:r>
           </a:p>
           <a:p>
@@ -11994,8 +12058,8 @@
         </p:nvSpPr>
         <p:spPr bwMode="auto">
           <a:xfrm>
-            <a:off x="838200" y="1825625"/>
-            <a:ext cx="10515600" cy="4351338"/>
+            <a:off x="838200" y="1458836"/>
+            <a:ext cx="10298906" cy="5265889"/>
           </a:xfrm>
           <a:prstGeom prst="rect">
             <a:avLst/>
@@ -12189,7 +12253,7 @@
                 <a:latin typeface="Arial" panose="020B0604020202020204" pitchFamily="34" charset="0"/>
                 <a:cs typeface="Arial" panose="020B0604020202020204" pitchFamily="34" charset="0"/>
               </a:rPr>
-              <a:t>Ускорение обучения программированию</a:t>
+              <a:t>Необходимость регулярной самостоятельной практики при изучении программирования.</a:t>
             </a:r>
           </a:p>
           <a:p>
@@ -12198,7 +12262,34 @@
                 <a:latin typeface="Arial" panose="020B0604020202020204" pitchFamily="34" charset="0"/>
                 <a:cs typeface="Arial" panose="020B0604020202020204" pitchFamily="34" charset="0"/>
               </a:rPr>
-              <a:t>Эффективная подготовка к техническим собеседованиям</a:t>
+              <a:t>Высокая трудоёмкость ручной проверки программных решений.</a:t>
+            </a:r>
+          </a:p>
+          <a:p>
+            <a:r>
+              <a:rPr lang="ru-RU" dirty="0">
+                <a:latin typeface="Arial" panose="020B0604020202020204" pitchFamily="34" charset="0"/>
+                <a:cs typeface="Arial" panose="020B0604020202020204" pitchFamily="34" charset="0"/>
+              </a:rPr>
+              <a:t>Потребность в автоматизированной проверке заданий и быстрой обратной связи.</a:t>
+            </a:r>
+          </a:p>
+          <a:p>
+            <a:r>
+              <a:rPr lang="ru-RU" dirty="0">
+                <a:latin typeface="Arial" panose="020B0604020202020204" pitchFamily="34" charset="0"/>
+                <a:cs typeface="Arial" panose="020B0604020202020204" pitchFamily="34" charset="0"/>
+              </a:rPr>
+              <a:t>Необходимость объективной фиксации прогресса обучающихся.</a:t>
+            </a:r>
+          </a:p>
+          <a:p>
+            <a:r>
+              <a:rPr lang="ru-RU" dirty="0">
+                <a:latin typeface="Arial" panose="020B0604020202020204" pitchFamily="34" charset="0"/>
+                <a:cs typeface="Arial" panose="020B0604020202020204" pitchFamily="34" charset="0"/>
+              </a:rPr>
+              <a:t>Практическая значимость подготовки к техническим собеседованиям и решению алгоритмических задач.</a:t>
             </a:r>
           </a:p>
         </p:txBody>
@@ -13558,7 +13649,7 @@
         </p:nvSpPr>
         <p:spPr bwMode="auto">
           <a:xfrm>
-            <a:off x="245166" y="123483"/>
+            <a:off x="268266" y="176459"/>
             <a:ext cx="10515600" cy="698033"/>
           </a:xfrm>
           <a:prstGeom prst="rect">
@@ -13594,7 +13685,7 @@
                 <a:latin typeface="Arial" panose="020B0604020202020204" pitchFamily="34" charset="0"/>
                 <a:cs typeface="Arial" panose="020B0604020202020204" pitchFamily="34" charset="0"/>
               </a:rPr>
-              <a:t>Цели и задачи</a:t>
+              <a:t>Цель и задачи</a:t>
             </a:r>
           </a:p>
         </p:txBody>
@@ -13615,8 +13706,8 @@
         </p:nvSpPr>
         <p:spPr bwMode="auto">
           <a:xfrm>
-            <a:off x="568186" y="2730751"/>
-            <a:ext cx="10515600" cy="3438136"/>
+            <a:off x="568186" y="3495133"/>
+            <a:ext cx="10515600" cy="1969836"/>
           </a:xfrm>
           <a:prstGeom prst="rect">
             <a:avLst/>
@@ -13803,24 +13894,6 @@
                 <a:latin typeface="Arial" panose="020B0604020202020204" pitchFamily="34" charset="0"/>
                 <a:cs typeface="Arial" panose="020B0604020202020204" pitchFamily="34" charset="0"/>
               </a:rPr>
-              <a:t>Спроектирована базовая предметная область</a:t>
-            </a:r>
-          </a:p>
-          <a:p>
-            <a:r>
-              <a:rPr lang="ru-RU" dirty="0">
-                <a:latin typeface="Arial" panose="020B0604020202020204" pitchFamily="34" charset="0"/>
-                <a:cs typeface="Arial" panose="020B0604020202020204" pitchFamily="34" charset="0"/>
-              </a:rPr>
-              <a:t>Реализован базовый пользовательский сценарий решения задачи</a:t>
-            </a:r>
-          </a:p>
-          <a:p>
-            <a:r>
-              <a:rPr lang="ru-RU" dirty="0">
-                <a:latin typeface="Arial" panose="020B0604020202020204" pitchFamily="34" charset="0"/>
-                <a:cs typeface="Arial" panose="020B0604020202020204" pitchFamily="34" charset="0"/>
-              </a:rPr>
               <a:t>Реализована первичная архитектура платформы с автоматической проверкой решений</a:t>
             </a:r>
           </a:p>
@@ -13846,8 +13919,8 @@
         </p:nvSpPr>
         <p:spPr bwMode="auto">
           <a:xfrm>
-            <a:off x="568186" y="1050843"/>
-            <a:ext cx="10515600" cy="523220"/>
+            <a:off x="568186" y="993064"/>
+            <a:ext cx="10515600" cy="1631216"/>
           </a:xfrm>
           <a:prstGeom prst="rect">
             <a:avLst/>
@@ -13879,7 +13952,7 @@
                 <a:latin typeface="Arial" panose="020B0604020202020204" pitchFamily="34" charset="0"/>
                 <a:cs typeface="Arial" panose="020B0604020202020204" pitchFamily="34" charset="0"/>
               </a:rPr>
-              <a:t>ускорение процесса обучения программированию</a:t>
+              <a:t>обеспечение автоматизированной самостоятельной практики по программированию за счёт проектирования архитектуры веб-платформы с системой задач, проверкой решений и механизмами обратной связи</a:t>
             </a:r>
           </a:p>
         </p:txBody>
@@ -13898,7 +13971,7 @@
         </p:nvSpPr>
         <p:spPr bwMode="auto">
           <a:xfrm>
-            <a:off x="568186" y="2102831"/>
+            <a:off x="568186" y="2861423"/>
             <a:ext cx="7184335" cy="523220"/>
           </a:xfrm>
           <a:prstGeom prst="rect">
@@ -14227,6 +14300,7 @@
             </a:r>
           </a:p>
           <a:p>
+            <a:pPr lvl="1"/>
             <a:r>
               <a:rPr lang="ru-RU" dirty="0">
                 <a:latin typeface="Arial" panose="020B0604020202020204" pitchFamily="34" charset="0"/>
@@ -14236,6 +14310,7 @@
             </a:r>
           </a:p>
           <a:p>
+            <a:pPr lvl="1"/>
             <a:r>
               <a:rPr lang="ru-RU" dirty="0">
                 <a:latin typeface="Arial" panose="020B0604020202020204" pitchFamily="34" charset="0"/>
@@ -14259,6 +14334,7 @@
             </a:r>
           </a:p>
           <a:p>
+            <a:pPr lvl="1"/>
             <a:r>
               <a:rPr lang="ru-RU" dirty="0">
                 <a:latin typeface="Arial" panose="020B0604020202020204" pitchFamily="34" charset="0"/>
@@ -14268,6 +14344,7 @@
             </a:r>
           </a:p>
           <a:p>
+            <a:pPr lvl="1"/>
             <a:r>
               <a:rPr lang="ru-RU" dirty="0">
                 <a:latin typeface="Arial" panose="020B0604020202020204" pitchFamily="34" charset="0"/>
@@ -14281,6 +14358,7 @@
             </a:endParaRPr>
           </a:p>
           <a:p>
+            <a:pPr lvl="1"/>
             <a:r>
               <a:rPr lang="ru-RU" dirty="0">
                 <a:latin typeface="Arial" panose="020B0604020202020204" pitchFamily="34" charset="0"/>
